--- a/docs/Automated Pneumonia Detection from Chest X-Ray Images.pptx
+++ b/docs/Automated Pneumonia Detection from Chest X-Ray Images.pptx
@@ -5,7 +5,7 @@
     <p:sldMasterId id="2147483690" r:id="rId4"/>
   </p:sldMasterIdLst>
   <p:notesMasterIdLst>
-    <p:notesMasterId r:id="rId14"/>
+    <p:notesMasterId r:id="rId13"/>
   </p:notesMasterIdLst>
   <p:sldIdLst>
     <p:sldId id="369" r:id="rId5"/>
@@ -16,7 +16,6 @@
     <p:sldId id="384" r:id="rId10"/>
     <p:sldId id="386" r:id="rId11"/>
     <p:sldId id="383" r:id="rId12"/>
-    <p:sldId id="372" r:id="rId13"/>
   </p:sldIdLst>
   <p:sldSz cx="12192000" cy="6858000"/>
   <p:notesSz cx="6858000" cy="9144000"/>
@@ -538,7 +537,7 @@
           <a:p>
             <a:fld id="{D4E35C32-9ADE-FE42-918C-822D8563D33E}" type="datetimeFigureOut">
               <a:rPr lang="en-US" smtClean="0"/>
-              <a:t>1/30/2026</a:t>
+              <a:t>4/5/2026</a:t>
             </a:fld>
             <a:endParaRPr lang="en-US"/>
           </a:p>
@@ -1044,7 +1043,7 @@
           <a:p>
             <a:fld id="{4BDF68E2-58F2-4D09-BE8B-E3BD06533059}" type="datetimeFigureOut">
               <a:rPr lang="en-US" dirty="0"/>
-              <a:t>1/30/2026</a:t>
+              <a:t>4/5/2026</a:t>
             </a:fld>
             <a:endParaRPr lang="en-US"/>
           </a:p>
@@ -1250,7 +1249,7 @@
           <a:p>
             <a:fld id="{2E2D6473-DF6D-4702-B328-E0DD40540A4E}" type="datetimeFigureOut">
               <a:rPr lang="en-US" dirty="0"/>
-              <a:t>1/30/2026</a:t>
+              <a:t>4/5/2026</a:t>
             </a:fld>
             <a:endParaRPr lang="en-US"/>
           </a:p>
@@ -1504,7 +1503,7 @@
           <a:p>
             <a:fld id="{E26F7E3A-B166-407D-9866-32884E7D5B37}" type="datetimeFigureOut">
               <a:rPr lang="en-US" dirty="0"/>
-              <a:t>1/30/2026</a:t>
+              <a:t>4/5/2026</a:t>
             </a:fld>
             <a:endParaRPr lang="en-US"/>
           </a:p>
@@ -1676,7 +1675,7 @@
           <a:p>
             <a:fld id="{528FC5F6-F338-4AE4-BB23-26385BCFC423}" type="datetimeFigureOut">
               <a:rPr lang="en-US" dirty="0"/>
-              <a:t>1/30/2026</a:t>
+              <a:t>4/5/2026</a:t>
             </a:fld>
             <a:endParaRPr lang="en-US"/>
           </a:p>
@@ -2018,7 +2017,7 @@
           <a:p>
             <a:fld id="{20EBB0C4-6273-4C6E-B9BD-2EDC30F1CD52}" type="datetimeFigureOut">
               <a:rPr lang="en-US" dirty="0"/>
-              <a:t>1/30/2026</a:t>
+              <a:t>4/5/2026</a:t>
             </a:fld>
             <a:endParaRPr lang="en-US"/>
           </a:p>
@@ -2290,7 +2289,7 @@
           <a:p>
             <a:fld id="{19AB4D41-86C1-4908-B66A-0B50CEB3BF29}" type="datetimeFigureOut">
               <a:rPr lang="en-US" dirty="0"/>
-              <a:t>1/30/2026</a:t>
+              <a:t>4/5/2026</a:t>
             </a:fld>
             <a:endParaRPr lang="en-US"/>
           </a:p>
@@ -2666,7 +2665,7 @@
           <a:p>
             <a:fld id="{E6426E2C-56C1-4E0D-A793-0088A7FDD37E}" type="datetimeFigureOut">
               <a:rPr lang="en-US" dirty="0"/>
-              <a:t>1/30/2026</a:t>
+              <a:t>4/5/2026</a:t>
             </a:fld>
             <a:endParaRPr lang="en-US"/>
           </a:p>
@@ -2783,7 +2782,7 @@
           <a:p>
             <a:fld id="{C8C39B41-D8B5-4052-B551-9B5525EAA8B6}" type="datetimeFigureOut">
               <a:rPr lang="en-US" dirty="0"/>
-              <a:t>1/30/2026</a:t>
+              <a:t>4/5/2026</a:t>
             </a:fld>
             <a:endParaRPr lang="en-US"/>
           </a:p>
@@ -2954,7 +2953,7 @@
           <a:p>
             <a:fld id="{4D94136C-8742-45B2-AF27-D93DF72833A9}" type="datetimeFigureOut">
               <a:rPr lang="en-US" dirty="0"/>
-              <a:t>1/30/2026</a:t>
+              <a:t>4/5/2026</a:t>
             </a:fld>
             <a:endParaRPr lang="en-US"/>
           </a:p>
@@ -3307,7 +3306,7 @@
           <a:p>
             <a:fld id="{32ABBEA6-7C60-4B02-AE87-00D78D8422AF}" type="datetimeFigureOut">
               <a:rPr lang="en-US" dirty="0"/>
-              <a:t>1/30/2026</a:t>
+              <a:t>4/5/2026</a:t>
             </a:fld>
             <a:endParaRPr lang="en-US"/>
           </a:p>
@@ -3685,7 +3684,7 @@
           <a:p>
             <a:fld id="{C9CAD897-D46E-4AD2-BD9B-49DD3E640873}" type="datetimeFigureOut">
               <a:rPr lang="en-US" dirty="0"/>
-              <a:t>1/30/2026</a:t>
+              <a:t>4/5/2026</a:t>
             </a:fld>
             <a:endParaRPr lang="en-US"/>
           </a:p>
@@ -3984,7 +3983,7 @@
           <a:p>
             <a:fld id="{98624D31-43A5-475A-80CF-332C9F6DCF35}" type="datetimeFigureOut">
               <a:rPr lang="en-US" dirty="0"/>
-              <a:t>1/30/2026</a:t>
+              <a:t>4/5/2026</a:t>
             </a:fld>
             <a:endParaRPr lang="en-US"/>
           </a:p>
@@ -4600,71 +4599,6 @@
       </p:sp>
       <p:sp>
         <p:nvSpPr>
-          <p:cNvPr id="3" name="Subtitle 2">
-            <a:extLst>
-              <a:ext uri="{FF2B5EF4-FFF2-40B4-BE49-F238E27FC236}">
-                <a16:creationId xmlns:a16="http://schemas.microsoft.com/office/drawing/2014/main" id="{8D7F59C3-A0E6-79EC-8CDE-DEDBE0A8C6E4}"/>
-              </a:ext>
-            </a:extLst>
-          </p:cNvPr>
-          <p:cNvSpPr>
-            <a:spLocks noGrp="1"/>
-          </p:cNvSpPr>
-          <p:nvPr>
-            <p:ph type="subTitle" idx="1"/>
-          </p:nvPr>
-        </p:nvSpPr>
-        <p:spPr>
-          <a:xfrm>
-            <a:off x="1154955" y="4061763"/>
-            <a:ext cx="8825658" cy="861420"/>
-          </a:xfrm>
-        </p:spPr>
-        <p:txBody>
-          <a:bodyPr vert="horz" lIns="91440" tIns="45720" rIns="91440" bIns="45720" rtlCol="0" anchor="t">
-            <a:noAutofit/>
-          </a:bodyPr>
-          <a:lstStyle/>
-          <a:p>
-            <a:r>
-              <a:rPr lang="en-US" sz="1400" dirty="0">
-                <a:latin typeface="Arial"/>
-                <a:cs typeface="Arial"/>
-              </a:rPr>
-              <a:t>Name: Vishakha kumari</a:t>
-            </a:r>
-          </a:p>
-          <a:p>
-            <a:r>
-              <a:rPr lang="en-US" sz="1400" dirty="0">
-                <a:latin typeface="Arial"/>
-                <a:cs typeface="Arial"/>
-              </a:rPr>
-              <a:t>Department: DSBA</a:t>
-            </a:r>
-          </a:p>
-          <a:p>
-            <a:r>
-              <a:rPr lang="en-US" sz="1400" dirty="0">
-                <a:latin typeface="Arial"/>
-                <a:cs typeface="Arial"/>
-              </a:rPr>
-              <a:t>SR NUMBER</a:t>
-            </a:r>
-            <a:r>
-              <a:rPr lang="en-US" sz="1400" dirty="0"/>
-              <a:t>:24848</a:t>
-            </a:r>
-            <a:endParaRPr lang="en-US" sz="1400">
-              <a:latin typeface="Arial"/>
-              <a:ea typeface="Calibri Light"/>
-              <a:cs typeface="Arial"/>
-            </a:endParaRPr>
-          </a:p>
-        </p:txBody>
-      </p:sp>
-      <p:sp>
-        <p:nvSpPr>
           <p:cNvPr id="5" name="Subtitle 2">
             <a:extLst>
               <a:ext uri="{FF2B5EF4-FFF2-40B4-BE49-F238E27FC236}">
@@ -4976,6 +4910,31 @@
               <a:ea typeface="Calibri Light" panose="020F0302020204030204"/>
               <a:cs typeface="Arial"/>
             </a:endParaRPr>
+          </a:p>
+        </p:txBody>
+      </p:sp>
+      <p:sp>
+        <p:nvSpPr>
+          <p:cNvPr id="6" name="Subtitle 5">
+            <a:extLst>
+              <a:ext uri="{FF2B5EF4-FFF2-40B4-BE49-F238E27FC236}">
+                <a16:creationId xmlns:a16="http://schemas.microsoft.com/office/drawing/2014/main" id="{6B8C53DC-6000-0CF9-C29A-A10C5604E360}"/>
+              </a:ext>
+            </a:extLst>
+          </p:cNvPr>
+          <p:cNvSpPr>
+            <a:spLocks noGrp="1"/>
+          </p:cNvSpPr>
+          <p:nvPr>
+            <p:ph type="subTitle" idx="1"/>
+          </p:nvPr>
+        </p:nvSpPr>
+        <p:spPr/>
+        <p:txBody>
+          <a:bodyPr/>
+          <a:lstStyle/>
+          <a:p>
+            <a:endParaRPr lang="en-IN"/>
           </a:p>
         </p:txBody>
       </p:sp>
@@ -6950,11 +6909,11 @@
           <a:lstStyle/>
           <a:p>
             <a:r>
-              <a:rPr lang="en-US" sz="2400" b="1" dirty="0">
+              <a:rPr lang="en-US" sz="2400" b="1">
                 <a:latin typeface="Arial"/>
                 <a:cs typeface="Arial"/>
               </a:rPr>
-              <a:t>INDIVIDUAL CONTRIBUTIONS</a:t>
+              <a:t>TASKS</a:t>
             </a:r>
             <a:endParaRPr lang="en-US" dirty="0"/>
           </a:p>
@@ -6975,7 +6934,7 @@
         <p:spPr>
           <a:xfrm>
             <a:off x="6441440" y="1926931"/>
-            <a:ext cx="4710770" cy="2123658"/>
+            <a:ext cx="4710770" cy="1846659"/>
           </a:xfrm>
           <a:prstGeom prst="rect">
             <a:avLst/>
@@ -6992,20 +6951,13 @@
           <a:lstStyle/>
           <a:p>
             <a:r>
-              <a:rPr lang="en-US" b="1" dirty="0"/>
-              <a:t>Rajib Roy (AI)</a:t>
-            </a:r>
-            <a:endParaRPr lang="en-US" dirty="0"/>
-          </a:p>
-          <a:p>
-            <a:r>
               <a:rPr lang="en-US" sz="1600" b="1" dirty="0">
                 <a:ea typeface="+mn-lt"/>
                 <a:cs typeface="+mn-lt"/>
               </a:rPr>
-              <a:t>Primary Focus: Modeling &amp; Architecture</a:t>
-            </a:r>
-            <a:endParaRPr lang="en-US" sz="1600">
+              <a:t>Modeling &amp; Architecture</a:t>
+            </a:r>
+            <a:endParaRPr lang="en-US" sz="1600" dirty="0">
               <a:ea typeface="Calibri"/>
               <a:cs typeface="Calibri"/>
             </a:endParaRPr>
@@ -7067,7 +7019,7 @@
               <a:t>Architecture comparison (</a:t>
             </a:r>
             <a:r>
-              <a:rPr lang="en-US" sz="1600" err="1">
+              <a:rPr lang="en-US" sz="1600" dirty="0" err="1">
                 <a:solidFill>
                   <a:schemeClr val="tx1">
                     <a:lumMod val="75000"/>
@@ -7093,7 +7045,7 @@
               <a:t>, </a:t>
             </a:r>
             <a:r>
-              <a:rPr lang="en-US" sz="1600" err="1">
+              <a:rPr lang="en-US" sz="1600" dirty="0" err="1">
                 <a:solidFill>
                   <a:schemeClr val="tx1">
                     <a:lumMod val="75000"/>
@@ -7180,7 +7132,7 @@
         <p:spPr>
           <a:xfrm>
             <a:off x="1239520" y="1930400"/>
-            <a:ext cx="4958080" cy="2123658"/>
+            <a:ext cx="4958080" cy="1846659"/>
           </a:xfrm>
           <a:prstGeom prst="rect">
             <a:avLst/>
@@ -7197,20 +7149,13 @@
           <a:lstStyle/>
           <a:p>
             <a:r>
-              <a:rPr lang="en-US" b="1" dirty="0"/>
-              <a:t>Vishakha Kumari (DSBA)</a:t>
-            </a:r>
-            <a:endParaRPr lang="en-US" dirty="0"/>
-          </a:p>
-          <a:p>
-            <a:r>
               <a:rPr lang="en-US" sz="1600" b="1" dirty="0">
                 <a:ea typeface="+mn-lt"/>
                 <a:cs typeface="+mn-lt"/>
               </a:rPr>
-              <a:t>Primary Focus: Data &amp; Evaluation</a:t>
-            </a:r>
-            <a:endParaRPr lang="en-US" sz="1600">
+              <a:t>Data &amp; Evaluation</a:t>
+            </a:r>
+            <a:endParaRPr lang="en-US" sz="1600" dirty="0">
               <a:ea typeface="Calibri"/>
               <a:cs typeface="Calibri"/>
             </a:endParaRPr>
@@ -7227,7 +7172,7 @@
               </a:rPr>
               <a:t>Dataset understanding and EDA</a:t>
             </a:r>
-            <a:endParaRPr lang="en-US" sz="1600">
+            <a:endParaRPr lang="en-US" sz="1600" dirty="0">
               <a:ea typeface="Calibri"/>
               <a:cs typeface="Calibri"/>
             </a:endParaRPr>
@@ -7244,7 +7189,7 @@
               </a:rPr>
               <a:t>Data preprocessing &amp; augmentation</a:t>
             </a:r>
-            <a:endParaRPr lang="en-US" sz="1600">
+            <a:endParaRPr lang="en-US" sz="1600" dirty="0">
               <a:ea typeface="Calibri"/>
               <a:cs typeface="Calibri"/>
             </a:endParaRPr>
@@ -7261,7 +7206,7 @@
               </a:rPr>
               <a:t>Handling class imbalance</a:t>
             </a:r>
-            <a:endParaRPr lang="en-US" sz="1600">
+            <a:endParaRPr lang="en-US" sz="1600" dirty="0">
               <a:ea typeface="Calibri"/>
               <a:cs typeface="Calibri"/>
             </a:endParaRPr>
@@ -7278,7 +7223,7 @@
               </a:rPr>
               <a:t>Model evaluation &amp; metrics analysis</a:t>
             </a:r>
-            <a:endParaRPr lang="en-US" sz="1600">
+            <a:endParaRPr lang="en-US" sz="1600" dirty="0">
               <a:ea typeface="Calibri"/>
               <a:cs typeface="Calibri"/>
             </a:endParaRPr>
@@ -7341,7 +7286,7 @@
           <a:p>
             <a:r>
               <a:rPr lang="en-US" b="1" dirty="0"/>
-              <a:t>Joint Responsibilities</a:t>
+              <a:t>Deliverables</a:t>
             </a:r>
             <a:endParaRPr lang="en-US" dirty="0"/>
           </a:p>
@@ -7414,177 +7359,6 @@
     <p:extLst>
       <p:ext uri="{BB962C8B-B14F-4D97-AF65-F5344CB8AC3E}">
         <p14:creationId xmlns:p14="http://schemas.microsoft.com/office/powerpoint/2010/main" val="1503428106"/>
-      </p:ext>
-    </p:extLst>
-  </p:cSld>
-  <p:clrMapOvr>
-    <a:masterClrMapping/>
-  </p:clrMapOvr>
-</p:sld>
-</file>
-
-<file path=ppt/slides/slide9.xml><?xml version="1.0" encoding="utf-8"?>
-<p:sld xmlns:a="http://schemas.openxmlformats.org/drawingml/2006/main" xmlns:r="http://schemas.openxmlformats.org/officeDocument/2006/relationships" xmlns:p="http://schemas.openxmlformats.org/presentationml/2006/main">
-  <p:cSld>
-    <p:spTree>
-      <p:nvGrpSpPr>
-        <p:cNvPr id="1" name=""/>
-        <p:cNvGrpSpPr/>
-        <p:nvPr/>
-      </p:nvGrpSpPr>
-      <p:grpSpPr>
-        <a:xfrm>
-          <a:off x="0" y="0"/>
-          <a:ext cx="0" cy="0"/>
-          <a:chOff x="0" y="0"/>
-          <a:chExt cx="0" cy="0"/>
-        </a:xfrm>
-      </p:grpSpPr>
-      <p:sp>
-        <p:nvSpPr>
-          <p:cNvPr id="2" name="Title 1">
-            <a:extLst>
-              <a:ext uri="{FF2B5EF4-FFF2-40B4-BE49-F238E27FC236}">
-                <a16:creationId xmlns:a16="http://schemas.microsoft.com/office/drawing/2014/main" id="{99682CCF-2F63-EAB6-7C55-723EA6D87BB9}"/>
-              </a:ext>
-            </a:extLst>
-          </p:cNvPr>
-          <p:cNvSpPr>
-            <a:spLocks noGrp="1"/>
-          </p:cNvSpPr>
-          <p:nvPr>
-            <p:ph type="title"/>
-          </p:nvPr>
-        </p:nvSpPr>
-        <p:spPr/>
-        <p:txBody>
-          <a:bodyPr>
-            <a:normAutofit/>
-          </a:bodyPr>
-          <a:lstStyle/>
-          <a:p>
-            <a:r>
-              <a:rPr lang="en-US" sz="2400" b="1" dirty="0">
-                <a:latin typeface="Arial"/>
-                <a:cs typeface="Arial"/>
-              </a:rPr>
-              <a:t>FINAL DELIVERABLES</a:t>
-            </a:r>
-            <a:endParaRPr lang="en-US" dirty="0"/>
-          </a:p>
-        </p:txBody>
-      </p:sp>
-      <p:sp>
-        <p:nvSpPr>
-          <p:cNvPr id="3" name="Content Placeholder 2">
-            <a:extLst>
-              <a:ext uri="{FF2B5EF4-FFF2-40B4-BE49-F238E27FC236}">
-                <a16:creationId xmlns:a16="http://schemas.microsoft.com/office/drawing/2014/main" id="{678AAD5A-5785-7955-7A1D-7D2F6F0BBCF9}"/>
-              </a:ext>
-            </a:extLst>
-          </p:cNvPr>
-          <p:cNvSpPr>
-            <a:spLocks noGrp="1"/>
-          </p:cNvSpPr>
-          <p:nvPr>
-            <p:ph idx="1"/>
-          </p:nvPr>
-        </p:nvSpPr>
-        <p:spPr>
-          <a:xfrm>
-            <a:off x="1094019" y="2054062"/>
-            <a:ext cx="8946541" cy="3869094"/>
-          </a:xfrm>
-        </p:spPr>
-        <p:txBody>
-          <a:bodyPr vert="horz" lIns="0" tIns="45720" rIns="0" bIns="45720" rtlCol="0" anchor="t">
-            <a:normAutofit/>
-          </a:bodyPr>
-          <a:lstStyle/>
-          <a:p>
-            <a:pPr>
-              <a:buFont typeface="Arial" panose="020F0502020204030204" pitchFamily="34" charset="0"/>
-              <a:buChar char="•"/>
-            </a:pPr>
-            <a:r>
-              <a:rPr lang="en-US" sz="2400" dirty="0">
-                <a:ea typeface="+mn-lt"/>
-                <a:cs typeface="+mn-lt"/>
-              </a:rPr>
-              <a:t>Trained CNN-based pneumonia detection model</a:t>
-            </a:r>
-            <a:endParaRPr lang="en-US" dirty="0">
-              <a:ea typeface="+mn-lt"/>
-              <a:cs typeface="+mn-lt"/>
-            </a:endParaRPr>
-          </a:p>
-          <a:p>
-            <a:pPr>
-              <a:buFont typeface="Arial" panose="020F0502020204030204" pitchFamily="34" charset="0"/>
-              <a:buChar char="•"/>
-            </a:pPr>
-            <a:r>
-              <a:rPr lang="en-US" sz="2400" dirty="0">
-                <a:ea typeface="+mn-lt"/>
-                <a:cs typeface="+mn-lt"/>
-              </a:rPr>
-              <a:t>Quantitative performance comparison</a:t>
-            </a:r>
-            <a:endParaRPr lang="en-IN" dirty="0">
-              <a:ea typeface="Calibri" panose="020F0502020204030204"/>
-              <a:cs typeface="Calibri" panose="020F0502020204030204"/>
-            </a:endParaRPr>
-          </a:p>
-          <a:p>
-            <a:pPr>
-              <a:buFont typeface="Arial" panose="020F0502020204030204" pitchFamily="34" charset="0"/>
-              <a:buChar char="•"/>
-            </a:pPr>
-            <a:r>
-              <a:rPr lang="en-US" sz="2400" dirty="0">
-                <a:ea typeface="+mn-lt"/>
-                <a:cs typeface="+mn-lt"/>
-              </a:rPr>
-              <a:t>Grad-CAM heatmaps for interpretability</a:t>
-            </a:r>
-            <a:endParaRPr lang="en-IN" dirty="0">
-              <a:ea typeface="Calibri" panose="020F0502020204030204"/>
-              <a:cs typeface="Calibri" panose="020F0502020204030204"/>
-            </a:endParaRPr>
-          </a:p>
-          <a:p>
-            <a:pPr>
-              <a:buFont typeface="Arial" panose="020F0502020204030204" pitchFamily="34" charset="0"/>
-              <a:buChar char="•"/>
-            </a:pPr>
-            <a:r>
-              <a:rPr lang="en-US" sz="2400" dirty="0">
-                <a:ea typeface="+mn-lt"/>
-                <a:cs typeface="+mn-lt"/>
-              </a:rPr>
-              <a:t>Final project report</a:t>
-            </a:r>
-            <a:endParaRPr lang="en-US" dirty="0">
-              <a:ea typeface="+mn-lt"/>
-              <a:cs typeface="+mn-lt"/>
-            </a:endParaRPr>
-          </a:p>
-          <a:p>
-            <a:pPr>
-              <a:buFont typeface="Arial" panose="020F0502020204030204" pitchFamily="34" charset="0"/>
-              <a:buChar char="•"/>
-            </a:pPr>
-            <a:endParaRPr lang="en-US" sz="2400" dirty="0">
-              <a:latin typeface="Arial" panose="020B0604020202020204" pitchFamily="34" charset="0"/>
-              <a:cs typeface="Arial" panose="020B0604020202020204" pitchFamily="34" charset="0"/>
-            </a:endParaRPr>
-          </a:p>
-        </p:txBody>
-      </p:sp>
-    </p:spTree>
-    <p:extLst>
-      <p:ext uri="{BB962C8B-B14F-4D97-AF65-F5344CB8AC3E}">
-        <p14:creationId xmlns:p14="http://schemas.microsoft.com/office/powerpoint/2010/main" val="2165070476"/>
       </p:ext>
     </p:extLst>
   </p:cSld>
@@ -8173,6 +7947,12 @@
 </file>
 
 <file path=customXml/item1.xml><?xml version="1.0" encoding="utf-8"?>
+<p:properties xmlns:p="http://schemas.microsoft.com/office/2006/metadata/properties" xmlns:xsi="http://www.w3.org/2001/XMLSchema-instance" xmlns:pc="http://schemas.microsoft.com/office/infopath/2007/PartnerControls">
+  <documentManagement/>
+</p:properties>
+</file>
+
+<file path=customXml/item2.xml><?xml version="1.0" encoding="utf-8"?>
 <ct:contentTypeSchema xmlns:ct="http://schemas.microsoft.com/office/2006/metadata/contentType" xmlns:ma="http://schemas.microsoft.com/office/2006/metadata/properties/metaAttributes" ct:_="" ma:_="" ma:contentTypeName="Document" ma:contentTypeID="0x01010064F7C72483F11D4DA2730B64E78C7605" ma:contentTypeVersion="7" ma:contentTypeDescription="Create a new document." ma:contentTypeScope="" ma:versionID="c5a03561bf4af1bce721cea200ac2399">
   <xsd:schema xmlns:xsd="http://www.w3.org/2001/XMLSchema" xmlns:xs="http://www.w3.org/2001/XMLSchema" xmlns:p="http://schemas.microsoft.com/office/2006/metadata/properties" xmlns:ns2="1159fd8f-c7e5-4925-83b7-d94dc0b8dd75" targetNamespace="http://schemas.microsoft.com/office/2006/metadata/properties" ma:root="true" ma:fieldsID="e529094f237f9660feba51cb96a248ad" ns2:_="">
     <xsd:import namespace="1159fd8f-c7e5-4925-83b7-d94dc0b8dd75"/>
@@ -8334,12 +8114,6 @@
 </ct:contentTypeSchema>
 </file>
 
-<file path=customXml/item2.xml><?xml version="1.0" encoding="utf-8"?>
-<p:properties xmlns:p="http://schemas.microsoft.com/office/2006/metadata/properties" xmlns:xsi="http://www.w3.org/2001/XMLSchema-instance" xmlns:pc="http://schemas.microsoft.com/office/infopath/2007/PartnerControls">
-  <documentManagement/>
-</p:properties>
-</file>
-
 <file path=customXml/item3.xml><?xml version="1.0" encoding="utf-8"?>
 <?mso-contentType ?>
 <FormTemplates xmlns="http://schemas.microsoft.com/sharepoint/v3/contenttype/forms">
@@ -8350,6 +8124,22 @@
 </file>
 
 <file path=customXml/itemProps1.xml><?xml version="1.0" encoding="utf-8"?>
+<ds:datastoreItem xmlns:ds="http://schemas.openxmlformats.org/officeDocument/2006/customXml" ds:itemID="{16E6B674-7718-4432-8E73-11BC8F29E346}">
+  <ds:schemaRefs>
+    <ds:schemaRef ds:uri="http://schemas.microsoft.com/office/infopath/2007/PartnerControls"/>
+    <ds:schemaRef ds:uri="http://purl.org/dc/terms/"/>
+    <ds:schemaRef ds:uri="http://www.w3.org/XML/1998/namespace"/>
+    <ds:schemaRef ds:uri="http://purl.org/dc/elements/1.1/"/>
+    <ds:schemaRef ds:uri="http://schemas.microsoft.com/office/2006/documentManagement/types"/>
+    <ds:schemaRef ds:uri="http://schemas.openxmlformats.org/package/2006/metadata/core-properties"/>
+    <ds:schemaRef ds:uri="http://purl.org/dc/dcmitype/"/>
+    <ds:schemaRef ds:uri="1159fd8f-c7e5-4925-83b7-d94dc0b8dd75"/>
+    <ds:schemaRef ds:uri="http://schemas.microsoft.com/office/2006/metadata/properties"/>
+  </ds:schemaRefs>
+</ds:datastoreItem>
+</file>
+
+<file path=customXml/itemProps2.xml><?xml version="1.0" encoding="utf-8"?>
 <ds:datastoreItem xmlns:ds="http://schemas.openxmlformats.org/officeDocument/2006/customXml" ds:itemID="{77CA4387-E4A6-4BFC-9F1D-91D00DF6EDB9}">
   <ds:schemaRefs>
     <ds:schemaRef ds:uri="1159fd8f-c7e5-4925-83b7-d94dc0b8dd75"/>
@@ -8367,22 +8157,6 @@
 </ds:datastoreItem>
 </file>
 
-<file path=customXml/itemProps2.xml><?xml version="1.0" encoding="utf-8"?>
-<ds:datastoreItem xmlns:ds="http://schemas.openxmlformats.org/officeDocument/2006/customXml" ds:itemID="{16E6B674-7718-4432-8E73-11BC8F29E346}">
-  <ds:schemaRefs>
-    <ds:schemaRef ds:uri="http://schemas.microsoft.com/office/infopath/2007/PartnerControls"/>
-    <ds:schemaRef ds:uri="http://purl.org/dc/terms/"/>
-    <ds:schemaRef ds:uri="http://www.w3.org/XML/1998/namespace"/>
-    <ds:schemaRef ds:uri="http://purl.org/dc/elements/1.1/"/>
-    <ds:schemaRef ds:uri="http://schemas.microsoft.com/office/2006/documentManagement/types"/>
-    <ds:schemaRef ds:uri="http://schemas.openxmlformats.org/package/2006/metadata/core-properties"/>
-    <ds:schemaRef ds:uri="http://purl.org/dc/dcmitype/"/>
-    <ds:schemaRef ds:uri="1159fd8f-c7e5-4925-83b7-d94dc0b8dd75"/>
-    <ds:schemaRef ds:uri="http://schemas.microsoft.com/office/2006/metadata/properties"/>
-  </ds:schemaRefs>
-</ds:datastoreItem>
-</file>
-
 <file path=customXml/itemProps3.xml><?xml version="1.0" encoding="utf-8"?>
 <ds:datastoreItem xmlns:ds="http://schemas.openxmlformats.org/officeDocument/2006/customXml" ds:itemID="{C31921DB-1F7E-44D2-B20E-60CA70495420}">
   <ds:schemaRefs>
